--- a/diagrams/Dormant Account Detection Dashboard.pptx
+++ b/diagrams/Dormant Account Detection Dashboard.pptx
@@ -3105,8 +3105,8 @@
         </p:blipFill>
         <p:spPr>
           <a:xfrm>
-            <a:off x="1145806" y="680000"/>
-            <a:ext cx="9900388" cy="5878000"/>
+            <a:off x="1978214" y="680000"/>
+            <a:ext cx="8235571" cy="5878000"/>
           </a:xfrm>
           <a:prstGeom prst="rect">
             <a:avLst/>
@@ -3181,8 +3181,8 @@
         </p:blipFill>
         <p:spPr>
           <a:xfrm>
-            <a:off x="1145806" y="680000"/>
-            <a:ext cx="9900388" cy="5878000"/>
+            <a:off x="1978214" y="680000"/>
+            <a:ext cx="8235571" cy="5878000"/>
           </a:xfrm>
           <a:prstGeom prst="rect">
             <a:avLst/>
